--- a/graphics/graphics.pptx
+++ b/graphics/graphics.pptx
@@ -228,7 +228,7 @@
           <a:p>
             <a:fld id="{B8404A9E-F80D-47A3-9ABE-4E375F8C7A58}" type="datetimeFigureOut">
               <a:rPr lang="fr-CA" smtClean="0"/>
-              <a:t>2026-05-22</a:t>
+              <a:t>2026-08-05</a:t>
             </a:fld>
             <a:endParaRPr lang="fr-CA"/>
           </a:p>
@@ -1245,7 +1245,7 @@
           <a:p>
             <a:fld id="{B1B97C2F-ED53-40B2-8245-274A53568F1F}" type="datetimeFigureOut">
               <a:rPr lang="fr-CA" smtClean="0"/>
-              <a:t>2026-05-22</a:t>
+              <a:t>2026-08-05</a:t>
             </a:fld>
             <a:endParaRPr lang="fr-CA"/>
           </a:p>
@@ -1445,7 +1445,7 @@
           <a:p>
             <a:fld id="{B1B97C2F-ED53-40B2-8245-274A53568F1F}" type="datetimeFigureOut">
               <a:rPr lang="fr-CA" smtClean="0"/>
-              <a:t>2026-05-22</a:t>
+              <a:t>2026-08-05</a:t>
             </a:fld>
             <a:endParaRPr lang="fr-CA"/>
           </a:p>
@@ -1655,7 +1655,7 @@
           <a:p>
             <a:fld id="{B1B97C2F-ED53-40B2-8245-274A53568F1F}" type="datetimeFigureOut">
               <a:rPr lang="fr-CA" smtClean="0"/>
-              <a:t>2026-05-22</a:t>
+              <a:t>2026-08-05</a:t>
             </a:fld>
             <a:endParaRPr lang="fr-CA"/>
           </a:p>
@@ -1877,7 +1877,7 @@
           <a:p>
             <a:fld id="{3CFA78C3-2C03-4D26-BA08-5201FB292C09}" type="datetimeFigureOut">
               <a:rPr lang="fr-CA" smtClean="0"/>
-              <a:t>2026-05-22</a:t>
+              <a:t>2026-08-05</a:t>
             </a:fld>
             <a:endParaRPr lang="fr-CA"/>
           </a:p>
@@ -2077,7 +2077,7 @@
           <a:p>
             <a:fld id="{3CFA78C3-2C03-4D26-BA08-5201FB292C09}" type="datetimeFigureOut">
               <a:rPr lang="fr-CA" smtClean="0"/>
-              <a:t>2026-05-22</a:t>
+              <a:t>2026-08-05</a:t>
             </a:fld>
             <a:endParaRPr lang="fr-CA"/>
           </a:p>
@@ -2353,7 +2353,7 @@
           <a:p>
             <a:fld id="{3CFA78C3-2C03-4D26-BA08-5201FB292C09}" type="datetimeFigureOut">
               <a:rPr lang="fr-CA" smtClean="0"/>
-              <a:t>2026-05-22</a:t>
+              <a:t>2026-08-05</a:t>
             </a:fld>
             <a:endParaRPr lang="fr-CA"/>
           </a:p>
@@ -2621,7 +2621,7 @@
           <a:p>
             <a:fld id="{3CFA78C3-2C03-4D26-BA08-5201FB292C09}" type="datetimeFigureOut">
               <a:rPr lang="fr-CA" smtClean="0"/>
-              <a:t>2026-05-22</a:t>
+              <a:t>2026-08-05</a:t>
             </a:fld>
             <a:endParaRPr lang="fr-CA"/>
           </a:p>
@@ -3036,7 +3036,7 @@
           <a:p>
             <a:fld id="{3CFA78C3-2C03-4D26-BA08-5201FB292C09}" type="datetimeFigureOut">
               <a:rPr lang="fr-CA" smtClean="0"/>
-              <a:t>2026-05-22</a:t>
+              <a:t>2026-08-05</a:t>
             </a:fld>
             <a:endParaRPr lang="fr-CA"/>
           </a:p>
@@ -3178,7 +3178,7 @@
           <a:p>
             <a:fld id="{3CFA78C3-2C03-4D26-BA08-5201FB292C09}" type="datetimeFigureOut">
               <a:rPr lang="fr-CA" smtClean="0"/>
-              <a:t>2026-05-22</a:t>
+              <a:t>2026-08-05</a:t>
             </a:fld>
             <a:endParaRPr lang="fr-CA"/>
           </a:p>
@@ -3291,7 +3291,7 @@
           <a:p>
             <a:fld id="{3CFA78C3-2C03-4D26-BA08-5201FB292C09}" type="datetimeFigureOut">
               <a:rPr lang="fr-CA" smtClean="0"/>
-              <a:t>2026-05-22</a:t>
+              <a:t>2026-08-05</a:t>
             </a:fld>
             <a:endParaRPr lang="fr-CA"/>
           </a:p>
@@ -3604,7 +3604,7 @@
           <a:p>
             <a:fld id="{3CFA78C3-2C03-4D26-BA08-5201FB292C09}" type="datetimeFigureOut">
               <a:rPr lang="fr-CA" smtClean="0"/>
-              <a:t>2026-05-22</a:t>
+              <a:t>2026-08-05</a:t>
             </a:fld>
             <a:endParaRPr lang="fr-CA"/>
           </a:p>
@@ -3804,7 +3804,7 @@
           <a:p>
             <a:fld id="{B1B97C2F-ED53-40B2-8245-274A53568F1F}" type="datetimeFigureOut">
               <a:rPr lang="fr-CA" smtClean="0"/>
-              <a:t>2026-05-22</a:t>
+              <a:t>2026-08-05</a:t>
             </a:fld>
             <a:endParaRPr lang="fr-CA"/>
           </a:p>
@@ -4093,7 +4093,7 @@
           <a:p>
             <a:fld id="{3CFA78C3-2C03-4D26-BA08-5201FB292C09}" type="datetimeFigureOut">
               <a:rPr lang="fr-CA" smtClean="0"/>
-              <a:t>2026-05-22</a:t>
+              <a:t>2026-08-05</a:t>
             </a:fld>
             <a:endParaRPr lang="fr-CA"/>
           </a:p>
@@ -4293,7 +4293,7 @@
           <a:p>
             <a:fld id="{3CFA78C3-2C03-4D26-BA08-5201FB292C09}" type="datetimeFigureOut">
               <a:rPr lang="fr-CA" smtClean="0"/>
-              <a:t>2026-05-22</a:t>
+              <a:t>2026-08-05</a:t>
             </a:fld>
             <a:endParaRPr lang="fr-CA"/>
           </a:p>
@@ -4503,7 +4503,7 @@
           <a:p>
             <a:fld id="{3CFA78C3-2C03-4D26-BA08-5201FB292C09}" type="datetimeFigureOut">
               <a:rPr lang="fr-CA" smtClean="0"/>
-              <a:t>2026-05-22</a:t>
+              <a:t>2026-08-05</a:t>
             </a:fld>
             <a:endParaRPr lang="fr-CA"/>
           </a:p>
@@ -4779,7 +4779,7 @@
           <a:p>
             <a:fld id="{B1B97C2F-ED53-40B2-8245-274A53568F1F}" type="datetimeFigureOut">
               <a:rPr lang="fr-CA" smtClean="0"/>
-              <a:t>2026-05-22</a:t>
+              <a:t>2026-08-05</a:t>
             </a:fld>
             <a:endParaRPr lang="fr-CA"/>
           </a:p>
@@ -5047,7 +5047,7 @@
           <a:p>
             <a:fld id="{B1B97C2F-ED53-40B2-8245-274A53568F1F}" type="datetimeFigureOut">
               <a:rPr lang="fr-CA" smtClean="0"/>
-              <a:t>2026-05-22</a:t>
+              <a:t>2026-08-05</a:t>
             </a:fld>
             <a:endParaRPr lang="fr-CA"/>
           </a:p>
@@ -5462,7 +5462,7 @@
           <a:p>
             <a:fld id="{B1B97C2F-ED53-40B2-8245-274A53568F1F}" type="datetimeFigureOut">
               <a:rPr lang="fr-CA" smtClean="0"/>
-              <a:t>2026-05-22</a:t>
+              <a:t>2026-08-05</a:t>
             </a:fld>
             <a:endParaRPr lang="fr-CA"/>
           </a:p>
@@ -5604,7 +5604,7 @@
           <a:p>
             <a:fld id="{B1B97C2F-ED53-40B2-8245-274A53568F1F}" type="datetimeFigureOut">
               <a:rPr lang="fr-CA" smtClean="0"/>
-              <a:t>2026-05-22</a:t>
+              <a:t>2026-08-05</a:t>
             </a:fld>
             <a:endParaRPr lang="fr-CA"/>
           </a:p>
@@ -5717,7 +5717,7 @@
           <a:p>
             <a:fld id="{B1B97C2F-ED53-40B2-8245-274A53568F1F}" type="datetimeFigureOut">
               <a:rPr lang="fr-CA" smtClean="0"/>
-              <a:t>2026-05-22</a:t>
+              <a:t>2026-08-05</a:t>
             </a:fld>
             <a:endParaRPr lang="fr-CA"/>
           </a:p>
@@ -6030,7 +6030,7 @@
           <a:p>
             <a:fld id="{B1B97C2F-ED53-40B2-8245-274A53568F1F}" type="datetimeFigureOut">
               <a:rPr lang="fr-CA" smtClean="0"/>
-              <a:t>2026-05-22</a:t>
+              <a:t>2026-08-05</a:t>
             </a:fld>
             <a:endParaRPr lang="fr-CA"/>
           </a:p>
@@ -6319,7 +6319,7 @@
           <a:p>
             <a:fld id="{B1B97C2F-ED53-40B2-8245-274A53568F1F}" type="datetimeFigureOut">
               <a:rPr lang="fr-CA" smtClean="0"/>
-              <a:t>2026-05-22</a:t>
+              <a:t>2026-08-05</a:t>
             </a:fld>
             <a:endParaRPr lang="fr-CA"/>
           </a:p>
@@ -6562,7 +6562,7 @@
           <a:p>
             <a:fld id="{B1B97C2F-ED53-40B2-8245-274A53568F1F}" type="datetimeFigureOut">
               <a:rPr lang="fr-CA" smtClean="0"/>
-              <a:t>2026-05-22</a:t>
+              <a:t>2026-08-05</a:t>
             </a:fld>
             <a:endParaRPr lang="fr-CA"/>
           </a:p>
@@ -7132,7 +7132,7 @@
           <a:p>
             <a:fld id="{3CFA78C3-2C03-4D26-BA08-5201FB292C09}" type="datetimeFigureOut">
               <a:rPr lang="fr-CA" smtClean="0"/>
-              <a:t>2026-05-22</a:t>
+              <a:t>2026-08-05</a:t>
             </a:fld>
             <a:endParaRPr lang="fr-CA"/>
           </a:p>
@@ -11239,6 +11239,522 @@
           </p:style>
         </p:cxnSp>
       </p:grpSp>
+      <p:sp>
+        <p:nvSpPr>
+          <p:cNvPr id="29" name="Rectangle : coins arrondis 28">
+            <a:extLst>
+              <a:ext uri="{FF2B5EF4-FFF2-40B4-BE49-F238E27FC236}">
+                <a16:creationId xmlns:a16="http://schemas.microsoft.com/office/drawing/2014/main" id="{B8BF7973-0161-0FB6-CF86-F70716B40E00}"/>
+              </a:ext>
+            </a:extLst>
+          </p:cNvPr>
+          <p:cNvSpPr/>
+          <p:nvPr/>
+        </p:nvSpPr>
+        <p:spPr>
+          <a:xfrm>
+            <a:off x="8683412" y="1335085"/>
+            <a:ext cx="1800000" cy="900000"/>
+          </a:xfrm>
+          <a:prstGeom prst="roundRect">
+            <a:avLst>
+              <a:gd name="adj" fmla="val 15620"/>
+            </a:avLst>
+          </a:prstGeom>
+          <a:solidFill>
+            <a:schemeClr val="tx1">
+              <a:lumMod val="95000"/>
+              <a:lumOff val="5000"/>
+            </a:schemeClr>
+          </a:solidFill>
+          <a:ln>
+            <a:noFill/>
+          </a:ln>
+        </p:spPr>
+        <p:style>
+          <a:lnRef idx="2">
+            <a:schemeClr val="accent5">
+              <a:shade val="15000"/>
+            </a:schemeClr>
+          </a:lnRef>
+          <a:fillRef idx="1">
+            <a:schemeClr val="accent5"/>
+          </a:fillRef>
+          <a:effectRef idx="0">
+            <a:schemeClr val="accent5"/>
+          </a:effectRef>
+          <a:fontRef idx="minor">
+            <a:schemeClr val="lt1"/>
+          </a:fontRef>
+        </p:style>
+        <p:txBody>
+          <a:bodyPr lIns="0" tIns="0" rIns="0" bIns="0" rtlCol="0" anchor="ctr"/>
+          <a:lstStyle/>
+          <a:p>
+            <a:pPr algn="ctr"/>
+            <a:r>
+              <a:rPr lang="en-CA" sz="8000" b="1" spc="-300" dirty="0">
+                <a:solidFill>
+                  <a:srgbClr val="92D050"/>
+                </a:solidFill>
+                <a:latin typeface="Courier New" panose="02070309020205020404" pitchFamily="49" charset="0"/>
+                <a:cs typeface="Courier New" panose="02070309020205020404" pitchFamily="49" charset="0"/>
+              </a:rPr>
+              <a:t>101</a:t>
+            </a:r>
+          </a:p>
+        </p:txBody>
+      </p:sp>
+      <p:sp>
+        <p:nvSpPr>
+          <p:cNvPr id="65" name="Rectangle : coins arrondis 64">
+            <a:extLst>
+              <a:ext uri="{FF2B5EF4-FFF2-40B4-BE49-F238E27FC236}">
+                <a16:creationId xmlns:a16="http://schemas.microsoft.com/office/drawing/2014/main" id="{DE4135A6-043A-44FD-F53D-46009EABB2D8}"/>
+              </a:ext>
+            </a:extLst>
+          </p:cNvPr>
+          <p:cNvSpPr/>
+          <p:nvPr/>
+        </p:nvSpPr>
+        <p:spPr>
+          <a:xfrm>
+            <a:off x="8683412" y="2581139"/>
+            <a:ext cx="1800000" cy="900000"/>
+          </a:xfrm>
+          <a:prstGeom prst="roundRect">
+            <a:avLst>
+              <a:gd name="adj" fmla="val 15620"/>
+            </a:avLst>
+          </a:prstGeom>
+          <a:solidFill>
+            <a:schemeClr val="tx1">
+              <a:lumMod val="95000"/>
+              <a:lumOff val="5000"/>
+            </a:schemeClr>
+          </a:solidFill>
+          <a:ln>
+            <a:noFill/>
+          </a:ln>
+        </p:spPr>
+        <p:style>
+          <a:lnRef idx="2">
+            <a:schemeClr val="accent5">
+              <a:shade val="15000"/>
+            </a:schemeClr>
+          </a:lnRef>
+          <a:fillRef idx="1">
+            <a:schemeClr val="accent5"/>
+          </a:fillRef>
+          <a:effectRef idx="0">
+            <a:schemeClr val="accent5"/>
+          </a:effectRef>
+          <a:fontRef idx="minor">
+            <a:schemeClr val="lt1"/>
+          </a:fontRef>
+        </p:style>
+        <p:txBody>
+          <a:bodyPr lIns="0" tIns="0" rIns="0" bIns="0" rtlCol="0" anchor="ctr"/>
+          <a:lstStyle/>
+          <a:p>
+            <a:pPr algn="ctr"/>
+            <a:r>
+              <a:rPr lang="en-CA" sz="8000" b="1" spc="-300" dirty="0">
+                <a:solidFill>
+                  <a:srgbClr val="92D050"/>
+                </a:solidFill>
+                <a:latin typeface="Courier New" panose="02070309020205020404" pitchFamily="49" charset="0"/>
+                <a:cs typeface="Courier New" panose="02070309020205020404" pitchFamily="49" charset="0"/>
+              </a:rPr>
+              <a:t>9AF</a:t>
+            </a:r>
+          </a:p>
+        </p:txBody>
+      </p:sp>
+      <p:sp>
+        <p:nvSpPr>
+          <p:cNvPr id="67" name="Rectangle : coins arrondis 66">
+            <a:extLst>
+              <a:ext uri="{FF2B5EF4-FFF2-40B4-BE49-F238E27FC236}">
+                <a16:creationId xmlns:a16="http://schemas.microsoft.com/office/drawing/2014/main" id="{411C8F70-ED3D-F03C-8012-8FA1DA70E091}"/>
+              </a:ext>
+            </a:extLst>
+          </p:cNvPr>
+          <p:cNvSpPr/>
+          <p:nvPr/>
+        </p:nvSpPr>
+        <p:spPr>
+          <a:xfrm>
+            <a:off x="8683412" y="3824946"/>
+            <a:ext cx="1800000" cy="900000"/>
+          </a:xfrm>
+          <a:prstGeom prst="roundRect">
+            <a:avLst>
+              <a:gd name="adj" fmla="val 15620"/>
+            </a:avLst>
+          </a:prstGeom>
+          <a:solidFill>
+            <a:schemeClr val="tx1">
+              <a:lumMod val="95000"/>
+              <a:lumOff val="5000"/>
+            </a:schemeClr>
+          </a:solidFill>
+          <a:ln>
+            <a:noFill/>
+          </a:ln>
+        </p:spPr>
+        <p:style>
+          <a:lnRef idx="2">
+            <a:schemeClr val="accent5">
+              <a:shade val="15000"/>
+            </a:schemeClr>
+          </a:lnRef>
+          <a:fillRef idx="1">
+            <a:schemeClr val="accent5"/>
+          </a:fillRef>
+          <a:effectRef idx="0">
+            <a:schemeClr val="accent5"/>
+          </a:effectRef>
+          <a:fontRef idx="minor">
+            <a:schemeClr val="lt1"/>
+          </a:fontRef>
+        </p:style>
+        <p:txBody>
+          <a:bodyPr lIns="0" tIns="0" rIns="0" bIns="0" rtlCol="0" anchor="ctr"/>
+          <a:lstStyle/>
+          <a:p>
+            <a:pPr algn="ctr"/>
+            <a:r>
+              <a:rPr lang="en-CA" sz="8000" b="1" spc="-300" dirty="0">
+                <a:solidFill>
+                  <a:srgbClr val="92D050"/>
+                </a:solidFill>
+                <a:latin typeface="Courier New" panose="02070309020205020404" pitchFamily="49" charset="0"/>
+                <a:cs typeface="Courier New" panose="02070309020205020404" pitchFamily="49" charset="0"/>
+              </a:rPr>
+              <a:t>123</a:t>
+            </a:r>
+          </a:p>
+        </p:txBody>
+      </p:sp>
+      <p:sp>
+        <p:nvSpPr>
+          <p:cNvPr id="78" name="Rectangle : coins arrondis 77">
+            <a:extLst>
+              <a:ext uri="{FF2B5EF4-FFF2-40B4-BE49-F238E27FC236}">
+                <a16:creationId xmlns:a16="http://schemas.microsoft.com/office/drawing/2014/main" id="{C767CAA3-176B-FDB7-D8CB-651C7C3E2721}"/>
+              </a:ext>
+            </a:extLst>
+          </p:cNvPr>
+          <p:cNvSpPr/>
+          <p:nvPr/>
+        </p:nvSpPr>
+        <p:spPr>
+          <a:xfrm>
+            <a:off x="6218247" y="1304507"/>
+            <a:ext cx="1800000" cy="900000"/>
+          </a:xfrm>
+          <a:prstGeom prst="roundRect">
+            <a:avLst>
+              <a:gd name="adj" fmla="val 15620"/>
+            </a:avLst>
+          </a:prstGeom>
+          <a:solidFill>
+            <a:schemeClr val="bg1">
+              <a:lumMod val="95000"/>
+            </a:schemeClr>
+          </a:solidFill>
+          <a:ln>
+            <a:noFill/>
+          </a:ln>
+        </p:spPr>
+        <p:style>
+          <a:lnRef idx="1">
+            <a:schemeClr val="accent5"/>
+          </a:lnRef>
+          <a:fillRef idx="2">
+            <a:schemeClr val="accent5"/>
+          </a:fillRef>
+          <a:effectRef idx="1">
+            <a:schemeClr val="accent5"/>
+          </a:effectRef>
+          <a:fontRef idx="minor">
+            <a:schemeClr val="dk1"/>
+          </a:fontRef>
+        </p:style>
+        <p:txBody>
+          <a:bodyPr lIns="0" tIns="0" rIns="0" bIns="0" rtlCol="0" anchor="ctr"/>
+          <a:lstStyle/>
+          <a:p>
+            <a:pPr algn="ctr"/>
+            <a:r>
+              <a:rPr lang="en-CA" sz="8000" b="1" spc="-300" dirty="0">
+                <a:solidFill>
+                  <a:schemeClr val="tx1"/>
+                </a:solidFill>
+                <a:latin typeface="Courier New" panose="02070309020205020404" pitchFamily="49" charset="0"/>
+                <a:cs typeface="Courier New" panose="02070309020205020404" pitchFamily="49" charset="0"/>
+              </a:rPr>
+              <a:t>101</a:t>
+            </a:r>
+          </a:p>
+        </p:txBody>
+      </p:sp>
+      <p:sp>
+        <p:nvSpPr>
+          <p:cNvPr id="86" name="Rectangle : coins arrondis 85">
+            <a:extLst>
+              <a:ext uri="{FF2B5EF4-FFF2-40B4-BE49-F238E27FC236}">
+                <a16:creationId xmlns:a16="http://schemas.microsoft.com/office/drawing/2014/main" id="{B194A913-9DB4-75C6-0ECB-B534BF7B82D0}"/>
+              </a:ext>
+            </a:extLst>
+          </p:cNvPr>
+          <p:cNvSpPr/>
+          <p:nvPr/>
+        </p:nvSpPr>
+        <p:spPr>
+          <a:xfrm>
+            <a:off x="6218247" y="2550561"/>
+            <a:ext cx="1800000" cy="900000"/>
+          </a:xfrm>
+          <a:prstGeom prst="roundRect">
+            <a:avLst>
+              <a:gd name="adj" fmla="val 15620"/>
+            </a:avLst>
+          </a:prstGeom>
+          <a:solidFill>
+            <a:schemeClr val="bg1">
+              <a:lumMod val="95000"/>
+            </a:schemeClr>
+          </a:solidFill>
+          <a:ln>
+            <a:noFill/>
+          </a:ln>
+        </p:spPr>
+        <p:style>
+          <a:lnRef idx="1">
+            <a:schemeClr val="accent5"/>
+          </a:lnRef>
+          <a:fillRef idx="2">
+            <a:schemeClr val="accent5"/>
+          </a:fillRef>
+          <a:effectRef idx="1">
+            <a:schemeClr val="accent5"/>
+          </a:effectRef>
+          <a:fontRef idx="minor">
+            <a:schemeClr val="dk1"/>
+          </a:fontRef>
+        </p:style>
+        <p:txBody>
+          <a:bodyPr lIns="0" tIns="0" rIns="0" bIns="0" rtlCol="0" anchor="ctr"/>
+          <a:lstStyle/>
+          <a:p>
+            <a:pPr algn="ctr"/>
+            <a:r>
+              <a:rPr lang="en-CA" sz="8000" b="1" spc="-300" dirty="0">
+                <a:solidFill>
+                  <a:schemeClr val="tx1"/>
+                </a:solidFill>
+                <a:latin typeface="Courier New" panose="02070309020205020404" pitchFamily="49" charset="0"/>
+                <a:cs typeface="Courier New" panose="02070309020205020404" pitchFamily="49" charset="0"/>
+              </a:rPr>
+              <a:t>9AF</a:t>
+            </a:r>
+          </a:p>
+        </p:txBody>
+      </p:sp>
+      <p:sp>
+        <p:nvSpPr>
+          <p:cNvPr id="89" name="Rectangle : coins arrondis 88">
+            <a:extLst>
+              <a:ext uri="{FF2B5EF4-FFF2-40B4-BE49-F238E27FC236}">
+                <a16:creationId xmlns:a16="http://schemas.microsoft.com/office/drawing/2014/main" id="{71A6F185-3C63-1D34-D7A9-1AB85DD89AA2}"/>
+              </a:ext>
+            </a:extLst>
+          </p:cNvPr>
+          <p:cNvSpPr/>
+          <p:nvPr/>
+        </p:nvSpPr>
+        <p:spPr>
+          <a:xfrm>
+            <a:off x="6218247" y="3794368"/>
+            <a:ext cx="1800000" cy="900000"/>
+          </a:xfrm>
+          <a:prstGeom prst="roundRect">
+            <a:avLst>
+              <a:gd name="adj" fmla="val 15620"/>
+            </a:avLst>
+          </a:prstGeom>
+          <a:solidFill>
+            <a:schemeClr val="bg1">
+              <a:lumMod val="95000"/>
+            </a:schemeClr>
+          </a:solidFill>
+          <a:ln>
+            <a:noFill/>
+          </a:ln>
+        </p:spPr>
+        <p:style>
+          <a:lnRef idx="1">
+            <a:schemeClr val="accent5"/>
+          </a:lnRef>
+          <a:fillRef idx="2">
+            <a:schemeClr val="accent5"/>
+          </a:fillRef>
+          <a:effectRef idx="1">
+            <a:schemeClr val="accent5"/>
+          </a:effectRef>
+          <a:fontRef idx="minor">
+            <a:schemeClr val="dk1"/>
+          </a:fontRef>
+        </p:style>
+        <p:txBody>
+          <a:bodyPr lIns="0" tIns="0" rIns="0" bIns="0" rtlCol="0" anchor="ctr"/>
+          <a:lstStyle/>
+          <a:p>
+            <a:pPr algn="ctr"/>
+            <a:r>
+              <a:rPr lang="en-CA" sz="8000" b="1" spc="-300" dirty="0">
+                <a:solidFill>
+                  <a:schemeClr val="tx1"/>
+                </a:solidFill>
+                <a:latin typeface="Courier New" panose="02070309020205020404" pitchFamily="49" charset="0"/>
+                <a:cs typeface="Courier New" panose="02070309020205020404" pitchFamily="49" charset="0"/>
+              </a:rPr>
+              <a:t>123</a:t>
+            </a:r>
+          </a:p>
+        </p:txBody>
+      </p:sp>
+      <p:sp>
+        <p:nvSpPr>
+          <p:cNvPr id="91" name="Rectangle : coins arrondis 90">
+            <a:extLst>
+              <a:ext uri="{FF2B5EF4-FFF2-40B4-BE49-F238E27FC236}">
+                <a16:creationId xmlns:a16="http://schemas.microsoft.com/office/drawing/2014/main" id="{66775EA8-446E-4B89-7BE4-2225F9DCF769}"/>
+              </a:ext>
+            </a:extLst>
+          </p:cNvPr>
+          <p:cNvSpPr/>
+          <p:nvPr/>
+        </p:nvSpPr>
+        <p:spPr>
+          <a:xfrm>
+            <a:off x="8683412" y="4953597"/>
+            <a:ext cx="1800000" cy="900000"/>
+          </a:xfrm>
+          <a:prstGeom prst="roundRect">
+            <a:avLst>
+              <a:gd name="adj" fmla="val 15620"/>
+            </a:avLst>
+          </a:prstGeom>
+          <a:solidFill>
+            <a:schemeClr val="tx1">
+              <a:lumMod val="95000"/>
+              <a:lumOff val="5000"/>
+            </a:schemeClr>
+          </a:solidFill>
+          <a:ln>
+            <a:noFill/>
+          </a:ln>
+        </p:spPr>
+        <p:style>
+          <a:lnRef idx="2">
+            <a:schemeClr val="accent5">
+              <a:shade val="15000"/>
+            </a:schemeClr>
+          </a:lnRef>
+          <a:fillRef idx="1">
+            <a:schemeClr val="accent5"/>
+          </a:fillRef>
+          <a:effectRef idx="0">
+            <a:schemeClr val="accent5"/>
+          </a:effectRef>
+          <a:fontRef idx="minor">
+            <a:schemeClr val="lt1"/>
+          </a:fontRef>
+        </p:style>
+        <p:txBody>
+          <a:bodyPr lIns="0" tIns="0" rIns="0" bIns="0" rtlCol="0" anchor="ctr"/>
+          <a:lstStyle/>
+          <a:p>
+            <a:pPr algn="ctr"/>
+            <a:r>
+              <a:rPr lang="en-CA" sz="8000" b="1" spc="-300" dirty="0">
+                <a:solidFill>
+                  <a:srgbClr val="92D050"/>
+                </a:solidFill>
+                <a:latin typeface="Courier New" panose="02070309020205020404" pitchFamily="49" charset="0"/>
+                <a:cs typeface="Courier New" panose="02070309020205020404" pitchFamily="49" charset="0"/>
+              </a:rPr>
+              <a:t>000</a:t>
+            </a:r>
+          </a:p>
+        </p:txBody>
+      </p:sp>
+      <p:sp>
+        <p:nvSpPr>
+          <p:cNvPr id="93" name="Rectangle : coins arrondis 92">
+            <a:extLst>
+              <a:ext uri="{FF2B5EF4-FFF2-40B4-BE49-F238E27FC236}">
+                <a16:creationId xmlns:a16="http://schemas.microsoft.com/office/drawing/2014/main" id="{B0AA9DA8-3569-7F0B-5141-CB9A125DEBB2}"/>
+              </a:ext>
+            </a:extLst>
+          </p:cNvPr>
+          <p:cNvSpPr/>
+          <p:nvPr/>
+        </p:nvSpPr>
+        <p:spPr>
+          <a:xfrm>
+            <a:off x="6218247" y="4923019"/>
+            <a:ext cx="1800000" cy="900000"/>
+          </a:xfrm>
+          <a:prstGeom prst="roundRect">
+            <a:avLst>
+              <a:gd name="adj" fmla="val 15620"/>
+            </a:avLst>
+          </a:prstGeom>
+          <a:solidFill>
+            <a:schemeClr val="bg1">
+              <a:lumMod val="95000"/>
+            </a:schemeClr>
+          </a:solidFill>
+          <a:ln>
+            <a:noFill/>
+          </a:ln>
+        </p:spPr>
+        <p:style>
+          <a:lnRef idx="1">
+            <a:schemeClr val="accent5"/>
+          </a:lnRef>
+          <a:fillRef idx="2">
+            <a:schemeClr val="accent5"/>
+          </a:fillRef>
+          <a:effectRef idx="1">
+            <a:schemeClr val="accent5"/>
+          </a:effectRef>
+          <a:fontRef idx="minor">
+            <a:schemeClr val="dk1"/>
+          </a:fontRef>
+        </p:style>
+        <p:txBody>
+          <a:bodyPr lIns="0" tIns="0" rIns="0" bIns="0" rtlCol="0" anchor="ctr"/>
+          <a:lstStyle/>
+          <a:p>
+            <a:pPr algn="ctr"/>
+            <a:r>
+              <a:rPr lang="en-CA" sz="8000" b="1" spc="-300" dirty="0">
+                <a:solidFill>
+                  <a:schemeClr val="tx1"/>
+                </a:solidFill>
+                <a:latin typeface="Courier New" panose="02070309020205020404" pitchFamily="49" charset="0"/>
+                <a:cs typeface="Courier New" panose="02070309020205020404" pitchFamily="49" charset="0"/>
+              </a:rPr>
+              <a:t>000</a:t>
+            </a:r>
+          </a:p>
+        </p:txBody>
+      </p:sp>
     </p:spTree>
     <p:extLst>
       <p:ext uri="{BB962C8B-B14F-4D97-AF65-F5344CB8AC3E}">
@@ -16617,10 +17133,10 @@
       </p:grpSpPr>
       <p:pic>
         <p:nvPicPr>
-          <p:cNvPr id="5" name="Image 4">
-            <a:extLst>
-              <a:ext uri="{FF2B5EF4-FFF2-40B4-BE49-F238E27FC236}">
-                <a16:creationId xmlns:a16="http://schemas.microsoft.com/office/drawing/2014/main" id="{F9A279E6-A31B-D63E-D094-5A9C6A061378}"/>
+          <p:cNvPr id="3" name="Image 2">
+            <a:extLst>
+              <a:ext uri="{FF2B5EF4-FFF2-40B4-BE49-F238E27FC236}">
+                <a16:creationId xmlns:a16="http://schemas.microsoft.com/office/drawing/2014/main" id="{DD727D62-621F-024F-FF0C-EF455A62A904}"/>
               </a:ext>
             </a:extLst>
           </p:cNvPr>
@@ -16630,21 +17146,15 @@
           <p:nvPr/>
         </p:nvPicPr>
         <p:blipFill>
-          <a:blip r:embed="rId2">
-            <a:extLst>
-              <a:ext uri="{28A0092B-C50C-407E-A947-70E740481C1C}">
-                <a14:useLocalDpi xmlns:a14="http://schemas.microsoft.com/office/drawing/2010/main" val="0"/>
-              </a:ext>
-            </a:extLst>
-          </a:blip>
+          <a:blip r:embed="rId2"/>
           <a:stretch>
             <a:fillRect/>
           </a:stretch>
         </p:blipFill>
         <p:spPr>
           <a:xfrm>
-            <a:off x="1147302" y="1104611"/>
-            <a:ext cx="6601746" cy="4134427"/>
+            <a:off x="1522408" y="1154297"/>
+            <a:ext cx="6620799" cy="4153480"/>
           </a:xfrm>
           <a:prstGeom prst="rect">
             <a:avLst/>
@@ -16665,13 +17175,18 @@
         </p:nvSpPr>
         <p:spPr>
           <a:xfrm>
-            <a:off x="2622698" y="1618962"/>
-            <a:ext cx="2339827" cy="307777"/>
+            <a:off x="4711424" y="1576096"/>
+            <a:ext cx="1793072" cy="307777"/>
           </a:xfrm>
           <a:prstGeom prst="rect">
             <a:avLst/>
           </a:prstGeom>
-          <a:noFill/>
+          <a:solidFill>
+            <a:schemeClr val="accent2">
+              <a:lumMod val="40000"/>
+              <a:lumOff val="60000"/>
+            </a:schemeClr>
+          </a:solidFill>
         </p:spPr>
         <p:txBody>
           <a:bodyPr wrap="square" rtlCol="0">
@@ -16680,163 +17195,164 @@
           <a:lstStyle/>
           <a:p>
             <a:r>
-              <a:rPr lang="en-CA" sz="1400" dirty="0">
-                <a:solidFill>
-                  <a:schemeClr val="accent1"/>
-                </a:solidFill>
-              </a:rPr>
-              <a:t>Upload: GUI </a:t>
+              <a:rPr lang="en-CA" sz="1400" b="1" dirty="0"/>
+              <a:t>Upload</a:t>
+            </a:r>
+            <a:r>
+              <a:rPr lang="en-CA" sz="1400" dirty="0"/>
+              <a:t>: GUI </a:t>
             </a:r>
             <a:r>
               <a:rPr lang="en-CA" sz="1400" dirty="0">
-                <a:solidFill>
-                  <a:schemeClr val="accent1"/>
-                </a:solidFill>
                 <a:sym typeface="Wingdings" panose="05000000000000000000" pitchFamily="2" charset="2"/>
               </a:rPr>
               <a:t> Server</a:t>
             </a:r>
-            <a:endParaRPr lang="en-CA" sz="1400" dirty="0">
-              <a:solidFill>
-                <a:schemeClr val="accent1"/>
-              </a:solidFill>
-            </a:endParaRPr>
+            <a:endParaRPr lang="en-CA" sz="1400" dirty="0"/>
+          </a:p>
+        </p:txBody>
+      </p:sp>
+      <p:sp>
+        <p:nvSpPr>
+          <p:cNvPr id="11" name="ZoneTexte 10">
+            <a:extLst>
+              <a:ext uri="{FF2B5EF4-FFF2-40B4-BE49-F238E27FC236}">
+                <a16:creationId xmlns:a16="http://schemas.microsoft.com/office/drawing/2014/main" id="{60C6FFA1-8D56-8CCE-220C-E4742B167899}"/>
+              </a:ext>
+            </a:extLst>
+          </p:cNvPr>
+          <p:cNvSpPr txBox="1"/>
+          <p:nvPr/>
+        </p:nvSpPr>
+        <p:spPr>
+          <a:xfrm>
+            <a:off x="1595510" y="1576096"/>
+            <a:ext cx="2339827" cy="307777"/>
+          </a:xfrm>
+          <a:prstGeom prst="rect">
+            <a:avLst/>
+          </a:prstGeom>
+          <a:solidFill>
+            <a:schemeClr val="accent2">
+              <a:lumMod val="40000"/>
+              <a:lumOff val="60000"/>
+            </a:schemeClr>
+          </a:solidFill>
+        </p:spPr>
+        <p:txBody>
+          <a:bodyPr wrap="square" rtlCol="0">
+            <a:spAutoFit/>
+          </a:bodyPr>
+          <a:lstStyle/>
+          <a:p>
+            <a:r>
+              <a:rPr lang="en-CA" sz="1400" b="1" dirty="0"/>
+              <a:t>Download</a:t>
+            </a:r>
+            <a:r>
+              <a:rPr lang="en-CA" sz="1400" dirty="0"/>
+              <a:t>: Server </a:t>
+            </a:r>
+            <a:r>
+              <a:rPr lang="en-CA" sz="1400" dirty="0">
+                <a:sym typeface="Wingdings" panose="05000000000000000000" pitchFamily="2" charset="2"/>
+              </a:rPr>
+              <a:t> </a:t>
+            </a:r>
+            <a:r>
+              <a:rPr lang="en-CA" sz="1400" dirty="0"/>
+              <a:t>GUI </a:t>
+            </a:r>
           </a:p>
         </p:txBody>
       </p:sp>
       <p:cxnSp>
         <p:nvCxnSpPr>
-          <p:cNvPr id="7" name="Connecteur droit avec flèche 6">
-            <a:extLst>
-              <a:ext uri="{FF2B5EF4-FFF2-40B4-BE49-F238E27FC236}">
-                <a16:creationId xmlns:a16="http://schemas.microsoft.com/office/drawing/2014/main" id="{CAC0E080-37BF-D5AC-DD84-FECC7014C00D}"/>
+          <p:cNvPr id="20" name="Connecteur : en angle 19">
+            <a:extLst>
+              <a:ext uri="{FF2B5EF4-FFF2-40B4-BE49-F238E27FC236}">
+                <a16:creationId xmlns:a16="http://schemas.microsoft.com/office/drawing/2014/main" id="{497E35AA-28DD-75B5-3EFC-D6E8A5B37DB7}"/>
               </a:ext>
             </a:extLst>
           </p:cNvPr>
           <p:cNvCxnSpPr>
             <a:cxnSpLocks/>
-            <a:stCxn id="6" idx="1"/>
           </p:cNvCxnSpPr>
           <p:nvPr/>
         </p:nvCxnSpPr>
         <p:spPr>
-          <a:xfrm flipH="1" flipV="1">
-            <a:off x="1657350" y="1618962"/>
-            <a:ext cx="965348" cy="153889"/>
+          <a:xfrm>
+            <a:off x="2752627" y="1883873"/>
+            <a:ext cx="1791093" cy="1764300"/>
           </a:xfrm>
-          <a:prstGeom prst="straightConnector1">
-            <a:avLst/>
+          <a:prstGeom prst="bentConnector3">
+            <a:avLst>
+              <a:gd name="adj1" fmla="val 0"/>
+            </a:avLst>
           </a:prstGeom>
-          <a:ln w="19050">
+          <a:ln w="76200">
+            <a:solidFill>
+              <a:srgbClr val="ED7D31"/>
+            </a:solidFill>
             <a:tailEnd type="triangle"/>
           </a:ln>
         </p:spPr>
         <p:style>
           <a:lnRef idx="1">
-            <a:schemeClr val="accent1"/>
+            <a:schemeClr val="accent5"/>
           </a:lnRef>
           <a:fillRef idx="0">
-            <a:schemeClr val="accent1"/>
+            <a:schemeClr val="accent5"/>
           </a:fillRef>
           <a:effectRef idx="0">
-            <a:schemeClr val="accent1"/>
+            <a:schemeClr val="accent5"/>
           </a:effectRef>
           <a:fontRef idx="minor">
             <a:schemeClr val="tx1"/>
           </a:fontRef>
         </p:style>
       </p:cxnSp>
-      <p:sp>
-        <p:nvSpPr>
-          <p:cNvPr id="11" name="ZoneTexte 10">
-            <a:extLst>
-              <a:ext uri="{FF2B5EF4-FFF2-40B4-BE49-F238E27FC236}">
-                <a16:creationId xmlns:a16="http://schemas.microsoft.com/office/drawing/2014/main" id="{60C6FFA1-8D56-8CCE-220C-E4742B167899}"/>
-              </a:ext>
-            </a:extLst>
-          </p:cNvPr>
-          <p:cNvSpPr txBox="1"/>
-          <p:nvPr/>
-        </p:nvSpPr>
-        <p:spPr>
-          <a:xfrm>
-            <a:off x="5694481" y="1618961"/>
-            <a:ext cx="2339827" cy="307777"/>
-          </a:xfrm>
-          <a:prstGeom prst="rect">
-            <a:avLst/>
-          </a:prstGeom>
-          <a:noFill/>
-        </p:spPr>
-        <p:txBody>
-          <a:bodyPr wrap="square" rtlCol="0">
-            <a:spAutoFit/>
-          </a:bodyPr>
-          <a:lstStyle/>
-          <a:p>
-            <a:r>
-              <a:rPr lang="en-CA" sz="1400" dirty="0">
-                <a:solidFill>
-                  <a:schemeClr val="accent1"/>
-                </a:solidFill>
-              </a:rPr>
-              <a:t>Download: Server </a:t>
-            </a:r>
-            <a:r>
-              <a:rPr lang="en-CA" sz="1400" dirty="0">
-                <a:solidFill>
-                  <a:schemeClr val="accent1"/>
-                </a:solidFill>
-                <a:sym typeface="Wingdings" panose="05000000000000000000" pitchFamily="2" charset="2"/>
-              </a:rPr>
-              <a:t> </a:t>
-            </a:r>
-            <a:r>
-              <a:rPr lang="en-CA" sz="1400" dirty="0">
-                <a:solidFill>
-                  <a:schemeClr val="accent1"/>
-                </a:solidFill>
-              </a:rPr>
-              <a:t>GUI </a:t>
-            </a:r>
-          </a:p>
-        </p:txBody>
-      </p:sp>
       <p:cxnSp>
         <p:nvCxnSpPr>
-          <p:cNvPr id="12" name="Connecteur droit avec flèche 11">
-            <a:extLst>
-              <a:ext uri="{FF2B5EF4-FFF2-40B4-BE49-F238E27FC236}">
-                <a16:creationId xmlns:a16="http://schemas.microsoft.com/office/drawing/2014/main" id="{FABE117C-34D1-F22D-A00F-7A69A3630F4E}"/>
+          <p:cNvPr id="24" name="Connecteur : en angle 23">
+            <a:extLst>
+              <a:ext uri="{FF2B5EF4-FFF2-40B4-BE49-F238E27FC236}">
+                <a16:creationId xmlns:a16="http://schemas.microsoft.com/office/drawing/2014/main" id="{978318CB-59A2-86F8-E6DA-CE26FFAA9857}"/>
               </a:ext>
             </a:extLst>
           </p:cNvPr>
           <p:cNvCxnSpPr>
             <a:cxnSpLocks/>
+            <a:stCxn id="6" idx="3"/>
           </p:cNvCxnSpPr>
           <p:nvPr/>
         </p:nvCxnSpPr>
         <p:spPr>
-          <a:xfrm flipH="1">
-            <a:off x="4962525" y="1926738"/>
-            <a:ext cx="1133475" cy="1597512"/>
+          <a:xfrm flipV="1">
+            <a:off x="6504496" y="1728788"/>
+            <a:ext cx="610679" cy="1197"/>
           </a:xfrm>
-          <a:prstGeom prst="straightConnector1">
-            <a:avLst/>
+          <a:prstGeom prst="bentConnector3">
+            <a:avLst>
+              <a:gd name="adj1" fmla="val 50000"/>
+            </a:avLst>
           </a:prstGeom>
-          <a:ln w="19050">
+          <a:ln w="76200">
+            <a:solidFill>
+              <a:srgbClr val="ED7D31"/>
+            </a:solidFill>
             <a:tailEnd type="triangle"/>
           </a:ln>
         </p:spPr>
         <p:style>
           <a:lnRef idx="1">
-            <a:schemeClr val="accent1"/>
+            <a:schemeClr val="accent5"/>
           </a:lnRef>
           <a:fillRef idx="0">
-            <a:schemeClr val="accent1"/>
+            <a:schemeClr val="accent5"/>
           </a:fillRef>
           <a:effectRef idx="0">
-            <a:schemeClr val="accent1"/>
+            <a:schemeClr val="accent5"/>
           </a:effectRef>
           <a:fontRef idx="minor">
             <a:schemeClr val="tx1"/>

--- a/graphics/graphics.pptx
+++ b/graphics/graphics.pptx
@@ -228,7 +228,7 @@
           <a:p>
             <a:fld id="{B8404A9E-F80D-47A3-9ABE-4E375F8C7A58}" type="datetimeFigureOut">
               <a:rPr lang="fr-CA" smtClean="0"/>
-              <a:t>2026-08-05</a:t>
+              <a:t>2026-10-14</a:t>
             </a:fld>
             <a:endParaRPr lang="fr-CA"/>
           </a:p>
@@ -1245,7 +1245,7 @@
           <a:p>
             <a:fld id="{B1B97C2F-ED53-40B2-8245-274A53568F1F}" type="datetimeFigureOut">
               <a:rPr lang="fr-CA" smtClean="0"/>
-              <a:t>2026-08-05</a:t>
+              <a:t>2026-10-14</a:t>
             </a:fld>
             <a:endParaRPr lang="fr-CA"/>
           </a:p>
@@ -1445,7 +1445,7 @@
           <a:p>
             <a:fld id="{B1B97C2F-ED53-40B2-8245-274A53568F1F}" type="datetimeFigureOut">
               <a:rPr lang="fr-CA" smtClean="0"/>
-              <a:t>2026-08-05</a:t>
+              <a:t>2026-10-14</a:t>
             </a:fld>
             <a:endParaRPr lang="fr-CA"/>
           </a:p>
@@ -1655,7 +1655,7 @@
           <a:p>
             <a:fld id="{B1B97C2F-ED53-40B2-8245-274A53568F1F}" type="datetimeFigureOut">
               <a:rPr lang="fr-CA" smtClean="0"/>
-              <a:t>2026-08-05</a:t>
+              <a:t>2026-10-14</a:t>
             </a:fld>
             <a:endParaRPr lang="fr-CA"/>
           </a:p>
@@ -1877,7 +1877,7 @@
           <a:p>
             <a:fld id="{3CFA78C3-2C03-4D26-BA08-5201FB292C09}" type="datetimeFigureOut">
               <a:rPr lang="fr-CA" smtClean="0"/>
-              <a:t>2026-08-05</a:t>
+              <a:t>2026-10-14</a:t>
             </a:fld>
             <a:endParaRPr lang="fr-CA"/>
           </a:p>
@@ -2077,7 +2077,7 @@
           <a:p>
             <a:fld id="{3CFA78C3-2C03-4D26-BA08-5201FB292C09}" type="datetimeFigureOut">
               <a:rPr lang="fr-CA" smtClean="0"/>
-              <a:t>2026-08-05</a:t>
+              <a:t>2026-10-14</a:t>
             </a:fld>
             <a:endParaRPr lang="fr-CA"/>
           </a:p>
@@ -2353,7 +2353,7 @@
           <a:p>
             <a:fld id="{3CFA78C3-2C03-4D26-BA08-5201FB292C09}" type="datetimeFigureOut">
               <a:rPr lang="fr-CA" smtClean="0"/>
-              <a:t>2026-08-05</a:t>
+              <a:t>2026-10-14</a:t>
             </a:fld>
             <a:endParaRPr lang="fr-CA"/>
           </a:p>
@@ -2621,7 +2621,7 @@
           <a:p>
             <a:fld id="{3CFA78C3-2C03-4D26-BA08-5201FB292C09}" type="datetimeFigureOut">
               <a:rPr lang="fr-CA" smtClean="0"/>
-              <a:t>2026-08-05</a:t>
+              <a:t>2026-10-14</a:t>
             </a:fld>
             <a:endParaRPr lang="fr-CA"/>
           </a:p>
@@ -3036,7 +3036,7 @@
           <a:p>
             <a:fld id="{3CFA78C3-2C03-4D26-BA08-5201FB292C09}" type="datetimeFigureOut">
               <a:rPr lang="fr-CA" smtClean="0"/>
-              <a:t>2026-08-05</a:t>
+              <a:t>2026-10-14</a:t>
             </a:fld>
             <a:endParaRPr lang="fr-CA"/>
           </a:p>
@@ -3178,7 +3178,7 @@
           <a:p>
             <a:fld id="{3CFA78C3-2C03-4D26-BA08-5201FB292C09}" type="datetimeFigureOut">
               <a:rPr lang="fr-CA" smtClean="0"/>
-              <a:t>2026-08-05</a:t>
+              <a:t>2026-10-14</a:t>
             </a:fld>
             <a:endParaRPr lang="fr-CA"/>
           </a:p>
@@ -3291,7 +3291,7 @@
           <a:p>
             <a:fld id="{3CFA78C3-2C03-4D26-BA08-5201FB292C09}" type="datetimeFigureOut">
               <a:rPr lang="fr-CA" smtClean="0"/>
-              <a:t>2026-08-05</a:t>
+              <a:t>2026-10-14</a:t>
             </a:fld>
             <a:endParaRPr lang="fr-CA"/>
           </a:p>
@@ -3604,7 +3604,7 @@
           <a:p>
             <a:fld id="{3CFA78C3-2C03-4D26-BA08-5201FB292C09}" type="datetimeFigureOut">
               <a:rPr lang="fr-CA" smtClean="0"/>
-              <a:t>2026-08-05</a:t>
+              <a:t>2026-10-14</a:t>
             </a:fld>
             <a:endParaRPr lang="fr-CA"/>
           </a:p>
@@ -3804,7 +3804,7 @@
           <a:p>
             <a:fld id="{B1B97C2F-ED53-40B2-8245-274A53568F1F}" type="datetimeFigureOut">
               <a:rPr lang="fr-CA" smtClean="0"/>
-              <a:t>2026-08-05</a:t>
+              <a:t>2026-10-14</a:t>
             </a:fld>
             <a:endParaRPr lang="fr-CA"/>
           </a:p>
@@ -4093,7 +4093,7 @@
           <a:p>
             <a:fld id="{3CFA78C3-2C03-4D26-BA08-5201FB292C09}" type="datetimeFigureOut">
               <a:rPr lang="fr-CA" smtClean="0"/>
-              <a:t>2026-08-05</a:t>
+              <a:t>2026-10-14</a:t>
             </a:fld>
             <a:endParaRPr lang="fr-CA"/>
           </a:p>
@@ -4293,7 +4293,7 @@
           <a:p>
             <a:fld id="{3CFA78C3-2C03-4D26-BA08-5201FB292C09}" type="datetimeFigureOut">
               <a:rPr lang="fr-CA" smtClean="0"/>
-              <a:t>2026-08-05</a:t>
+              <a:t>2026-10-14</a:t>
             </a:fld>
             <a:endParaRPr lang="fr-CA"/>
           </a:p>
@@ -4503,7 +4503,7 @@
           <a:p>
             <a:fld id="{3CFA78C3-2C03-4D26-BA08-5201FB292C09}" type="datetimeFigureOut">
               <a:rPr lang="fr-CA" smtClean="0"/>
-              <a:t>2026-08-05</a:t>
+              <a:t>2026-10-14</a:t>
             </a:fld>
             <a:endParaRPr lang="fr-CA"/>
           </a:p>
@@ -4779,7 +4779,7 @@
           <a:p>
             <a:fld id="{B1B97C2F-ED53-40B2-8245-274A53568F1F}" type="datetimeFigureOut">
               <a:rPr lang="fr-CA" smtClean="0"/>
-              <a:t>2026-08-05</a:t>
+              <a:t>2026-10-14</a:t>
             </a:fld>
             <a:endParaRPr lang="fr-CA"/>
           </a:p>
@@ -5047,7 +5047,7 @@
           <a:p>
             <a:fld id="{B1B97C2F-ED53-40B2-8245-274A53568F1F}" type="datetimeFigureOut">
               <a:rPr lang="fr-CA" smtClean="0"/>
-              <a:t>2026-08-05</a:t>
+              <a:t>2026-10-14</a:t>
             </a:fld>
             <a:endParaRPr lang="fr-CA"/>
           </a:p>
@@ -5462,7 +5462,7 @@
           <a:p>
             <a:fld id="{B1B97C2F-ED53-40B2-8245-274A53568F1F}" type="datetimeFigureOut">
               <a:rPr lang="fr-CA" smtClean="0"/>
-              <a:t>2026-08-05</a:t>
+              <a:t>2026-10-14</a:t>
             </a:fld>
             <a:endParaRPr lang="fr-CA"/>
           </a:p>
@@ -5604,7 +5604,7 @@
           <a:p>
             <a:fld id="{B1B97C2F-ED53-40B2-8245-274A53568F1F}" type="datetimeFigureOut">
               <a:rPr lang="fr-CA" smtClean="0"/>
-              <a:t>2026-08-05</a:t>
+              <a:t>2026-10-14</a:t>
             </a:fld>
             <a:endParaRPr lang="fr-CA"/>
           </a:p>
@@ -5717,7 +5717,7 @@
           <a:p>
             <a:fld id="{B1B97C2F-ED53-40B2-8245-274A53568F1F}" type="datetimeFigureOut">
               <a:rPr lang="fr-CA" smtClean="0"/>
-              <a:t>2026-08-05</a:t>
+              <a:t>2026-10-14</a:t>
             </a:fld>
             <a:endParaRPr lang="fr-CA"/>
           </a:p>
@@ -6030,7 +6030,7 @@
           <a:p>
             <a:fld id="{B1B97C2F-ED53-40B2-8245-274A53568F1F}" type="datetimeFigureOut">
               <a:rPr lang="fr-CA" smtClean="0"/>
-              <a:t>2026-08-05</a:t>
+              <a:t>2026-10-14</a:t>
             </a:fld>
             <a:endParaRPr lang="fr-CA"/>
           </a:p>
@@ -6319,7 +6319,7 @@
           <a:p>
             <a:fld id="{B1B97C2F-ED53-40B2-8245-274A53568F1F}" type="datetimeFigureOut">
               <a:rPr lang="fr-CA" smtClean="0"/>
-              <a:t>2026-08-05</a:t>
+              <a:t>2026-10-14</a:t>
             </a:fld>
             <a:endParaRPr lang="fr-CA"/>
           </a:p>
@@ -6562,7 +6562,7 @@
           <a:p>
             <a:fld id="{B1B97C2F-ED53-40B2-8245-274A53568F1F}" type="datetimeFigureOut">
               <a:rPr lang="fr-CA" smtClean="0"/>
-              <a:t>2026-08-05</a:t>
+              <a:t>2026-10-14</a:t>
             </a:fld>
             <a:endParaRPr lang="fr-CA"/>
           </a:p>
@@ -7132,7 +7132,7 @@
           <a:p>
             <a:fld id="{3CFA78C3-2C03-4D26-BA08-5201FB292C09}" type="datetimeFigureOut">
               <a:rPr lang="fr-CA" smtClean="0"/>
-              <a:t>2026-08-05</a:t>
+              <a:t>2026-10-14</a:t>
             </a:fld>
             <a:endParaRPr lang="fr-CA"/>
           </a:p>
@@ -25626,6 +25626,116 @@
           </p:txBody>
         </p:sp>
       </p:grpSp>
+      <mc:AlternateContent xmlns:mc="http://schemas.openxmlformats.org/markup-compatibility/2006">
+        <mc:Choice xmlns:a14="http://schemas.microsoft.com/office/drawing/2010/main" Requires="a14">
+          <p:sp>
+            <p:nvSpPr>
+              <p:cNvPr id="7" name="ZoneTexte 6">
+                <a:extLst>
+                  <a:ext uri="{FF2B5EF4-FFF2-40B4-BE49-F238E27FC236}">
+                    <a16:creationId xmlns:a16="http://schemas.microsoft.com/office/drawing/2014/main" id="{7C6290AB-532D-309D-816B-230E678122F4}"/>
+                  </a:ext>
+                </a:extLst>
+              </p:cNvPr>
+              <p:cNvSpPr txBox="1"/>
+              <p:nvPr/>
+            </p:nvSpPr>
+            <p:spPr>
+              <a:xfrm>
+                <a:off x="9225164" y="505827"/>
+                <a:ext cx="2022220" cy="1200329"/>
+              </a:xfrm>
+              <a:prstGeom prst="rect">
+                <a:avLst/>
+              </a:prstGeom>
+              <a:noFill/>
+            </p:spPr>
+            <p:txBody>
+              <a:bodyPr wrap="none" rtlCol="0">
+                <a:spAutoFit/>
+              </a:bodyPr>
+              <a:lstStyle/>
+              <a:p>
+                <a14:m>
+                  <m:oMathPara xmlns:m="http://schemas.openxmlformats.org/officeDocument/2006/math">
+                    <m:oMath>
+                      <m:r>
+                        <a:rPr lang="en-CA" sz="7200" b="1" i="1" spc="-300" smtClean="0">
+                          <a:latin typeface="Cambria Math" panose="02040503050406030204" pitchFamily="18" charset="0"/>
+                        </a:rPr>
+                        <m:t>𝒇</m:t>
+                      </m:r>
+                      <m:r>
+                        <a:rPr lang="en-CA" sz="7200" b="1" i="1" spc="-300" smtClean="0">
+                          <a:latin typeface="Cambria Math" panose="02040503050406030204" pitchFamily="18" charset="0"/>
+                        </a:rPr>
+                        <m:t>(</m:t>
+                      </m:r>
+                      <m:r>
+                        <a:rPr lang="en-CA" sz="7200" b="1" i="1" spc="-300" smtClean="0">
+                          <a:latin typeface="Cambria Math" panose="02040503050406030204" pitchFamily="18" charset="0"/>
+                        </a:rPr>
+                        <m:t>𝒙</m:t>
+                      </m:r>
+                      <m:r>
+                        <a:rPr lang="en-CA" sz="7200" b="1" i="1" spc="-300" smtClean="0">
+                          <a:latin typeface="Cambria Math" panose="02040503050406030204" pitchFamily="18" charset="0"/>
+                        </a:rPr>
+                        <m:t>)</m:t>
+                      </m:r>
+                    </m:oMath>
+                  </m:oMathPara>
+                </a14:m>
+                <a:endParaRPr lang="en-CA" sz="7200" b="1" i="1" spc="-300" dirty="0"/>
+              </a:p>
+            </p:txBody>
+          </p:sp>
+        </mc:Choice>
+        <mc:Fallback>
+          <p:sp>
+            <p:nvSpPr>
+              <p:cNvPr id="7" name="ZoneTexte 6">
+                <a:extLst>
+                  <a:ext uri="{FF2B5EF4-FFF2-40B4-BE49-F238E27FC236}">
+                    <a16:creationId xmlns:a16="http://schemas.microsoft.com/office/drawing/2014/main" id="{7C6290AB-532D-309D-816B-230E678122F4}"/>
+                  </a:ext>
+                </a:extLst>
+              </p:cNvPr>
+              <p:cNvSpPr txBox="1">
+                <a:spLocks noRot="1" noChangeAspect="1" noMove="1" noResize="1" noEditPoints="1" noAdjustHandles="1" noChangeArrowheads="1" noChangeShapeType="1" noTextEdit="1"/>
+              </p:cNvSpPr>
+              <p:nvPr/>
+            </p:nvSpPr>
+            <p:spPr>
+              <a:xfrm>
+                <a:off x="9225164" y="505827"/>
+                <a:ext cx="2022220" cy="1200329"/>
+              </a:xfrm>
+              <a:prstGeom prst="rect">
+                <a:avLst/>
+              </a:prstGeom>
+              <a:blipFill>
+                <a:blip r:embed="rId2"/>
+                <a:stretch>
+                  <a:fillRect/>
+                </a:stretch>
+              </a:blipFill>
+            </p:spPr>
+            <p:txBody>
+              <a:bodyPr/>
+              <a:lstStyle/>
+              <a:p>
+                <a:r>
+                  <a:rPr lang="en-CA">
+                    <a:noFill/>
+                  </a:rPr>
+                  <a:t> </a:t>
+                </a:r>
+              </a:p>
+            </p:txBody>
+          </p:sp>
+        </mc:Fallback>
+      </mc:AlternateContent>
     </p:spTree>
     <p:extLst>
       <p:ext uri="{BB962C8B-B14F-4D97-AF65-F5344CB8AC3E}">
